--- a/Ch16_France_England.pptx
+++ b/Ch16_France_England.pptx
@@ -9099,7 +9099,7 @@
               <a:buNone/>
             </a:pPr>
             <a:r>
-              <a:rPr lang="en-US" sz="2800" b="1" dirty="0">
+              <a:rPr lang="en-US" sz="2400" b="1" dirty="0">
                 <a:solidFill>
                   <a:srgbClr val="C8A030"/>
                 </a:solidFill>
@@ -9109,7 +9109,7 @@
               </a:rPr>
               <a:t>NAWM 90b · Purcell, "When I am laid in earth"</a:t>
             </a:r>
-            <a:endParaRPr lang="en-US" sz="2800" dirty="0"/>
+            <a:endParaRPr lang="en-US" sz="2400" dirty="0"/>
           </a:p>
         </p:txBody>
       </p:sp>
@@ -15859,7 +15859,7 @@
         <p:spPr>
           <a:xfrm>
             <a:off x="457200" y="4526280"/>
-            <a:ext cx="8229600" cy="457200"/>
+            <a:ext cx="8229600" cy="475488"/>
           </a:xfrm>
           <a:prstGeom prst="rect">
             <a:avLst/>
@@ -15873,12 +15873,12 @@
           <a:p>
             <a:pPr indent="0" marL="0">
               <a:lnSpc>
-                <a:spcPct val="105000"/>
+                <a:spcPct val="110000"/>
               </a:lnSpc>
               <a:buNone/>
             </a:pPr>
             <a:r>
-              <a:rPr lang="en-US" sz="1800" dirty="0">
+              <a:rPr lang="en-US" sz="1400" dirty="0">
                 <a:solidFill>
                   <a:srgbClr val="C8A030"/>
                 </a:solidFill>
@@ -15888,17 +15888,17 @@
               </a:rPr>
               <a:t>Vingt-quatre Violons du Roi (24 Violins) — 首個大型弦樂合奏 = 現代管弦樂團原型</a:t>
             </a:r>
-            <a:endParaRPr lang="en-US" sz="1800" dirty="0"/>
+            <a:endParaRPr lang="en-US" sz="1400" dirty="0"/>
           </a:p>
           <a:p>
             <a:pPr indent="0" marL="0">
               <a:lnSpc>
-                <a:spcPct val="105000"/>
+                <a:spcPct val="110000"/>
               </a:lnSpc>
               <a:buNone/>
             </a:pPr>
             <a:r>
-              <a:rPr lang="en-US" sz="1800" dirty="0">
+              <a:rPr lang="en-US" sz="1400" dirty="0">
                 <a:solidFill>
                   <a:srgbClr val="C8A030"/>
                 </a:solidFill>
@@ -15908,7 +15908,7 @@
               </a:rPr>
               <a:t>Petits Violons (18 strings) — Louis XIV 的私人樂團</a:t>
             </a:r>
-            <a:endParaRPr lang="en-US" sz="1800" dirty="0"/>
+            <a:endParaRPr lang="en-US" sz="1400" dirty="0"/>
           </a:p>
         </p:txBody>
       </p:sp>

--- a/Ch16_France_England.pptx
+++ b/Ch16_France_England.pptx
@@ -6160,7 +6160,7 @@
                   </a:extLst>
                 </a:hlinkClick>
               </a:rPr>
-              <a:t>https://www.youtube.com/watch?v=xPgHQpp_tBM</a:t>
+              <a:t>https://www.youtube.com/watch?v=_wYhLVX5kPQ</a:t>
             </a:r>
             <a:endParaRPr lang="en-US" sz="1600" dirty="0"/>
           </a:p>
@@ -9556,7 +9556,7 @@
                   </a:extLst>
                 </a:hlinkClick>
               </a:rPr>
-              <a:t>https://www.youtube.com/watch?v=GjfbMBSzzXg</a:t>
+              <a:t>https://www.youtube.com/watch?v=_EkjmEFk6uk</a:t>
             </a:r>
             <a:endParaRPr lang="en-US" sz="1600" dirty="0"/>
           </a:p>
@@ -17343,7 +17343,7 @@
                   </a:extLst>
                 </a:hlinkClick>
               </a:rPr>
-              <a:t>https://www.youtube.com/watch?v=P1N_FYfcqMg</a:t>
+              <a:t>https://www.youtube.com/watch?v=7FcAzxSa1xo</a:t>
             </a:r>
             <a:endParaRPr lang="en-US" sz="1800" dirty="0"/>
           </a:p>
